--- a/finance/Fraud_Analytics/1_Fraud_landscape.pptx
+++ b/finance/Fraud_Analytics/1_Fraud_landscape.pptx
@@ -231,7 +231,7 @@
           <a:p>
             <a:fld id="{7BAEECA8-D063-486F-AE31-5020270C1449}" type="datetimeFigureOut">
               <a:rPr lang="en-US" smtClean="0"/>
-              <a:t>5/18/2026</a:t>
+              <a:t>10/17/2026</a:t>
             </a:fld>
             <a:endParaRPr lang="en-US"/>
           </a:p>
@@ -1016,7 +1016,7 @@
           <a:p>
             <a:fld id="{CB233BD1-3BA8-448D-9D08-7846095EA517}" type="datetimeFigureOut">
               <a:rPr lang="en-US" smtClean="0"/>
-              <a:t>5/18/2026</a:t>
+              <a:t>10/17/2026</a:t>
             </a:fld>
             <a:endParaRPr lang="en-US"/>
           </a:p>
@@ -1430,7 +1430,7 @@
           <a:p>
             <a:fld id="{6383FAE1-13DE-4511-8C1B-C8AFB720664C}" type="datetimeFigureOut">
               <a:rPr lang="en-US" smtClean="0"/>
-              <a:t>5/18/2026</a:t>
+              <a:t>10/17/2026</a:t>
             </a:fld>
             <a:endParaRPr lang="en-US"/>
           </a:p>
@@ -1628,7 +1628,7 @@
           <a:p>
             <a:fld id="{6383FAE1-13DE-4511-8C1B-C8AFB720664C}" type="datetimeFigureOut">
               <a:rPr lang="en-US" smtClean="0"/>
-              <a:t>5/18/2026</a:t>
+              <a:t>10/17/2026</a:t>
             </a:fld>
             <a:endParaRPr lang="en-US"/>
           </a:p>
@@ -1836,7 +1836,7 @@
           <a:p>
             <a:fld id="{6383FAE1-13DE-4511-8C1B-C8AFB720664C}" type="datetimeFigureOut">
               <a:rPr lang="en-US" smtClean="0"/>
-              <a:t>5/18/2026</a:t>
+              <a:t>10/17/2026</a:t>
             </a:fld>
             <a:endParaRPr lang="en-US"/>
           </a:p>
@@ -2034,7 +2034,7 @@
           <a:p>
             <a:fld id="{6383FAE1-13DE-4511-8C1B-C8AFB720664C}" type="datetimeFigureOut">
               <a:rPr lang="en-US" smtClean="0"/>
-              <a:t>5/18/2026</a:t>
+              <a:t>10/17/2026</a:t>
             </a:fld>
             <a:endParaRPr lang="en-US"/>
           </a:p>
@@ -2309,7 +2309,7 @@
           <a:p>
             <a:fld id="{6383FAE1-13DE-4511-8C1B-C8AFB720664C}" type="datetimeFigureOut">
               <a:rPr lang="en-US" smtClean="0"/>
-              <a:t>5/18/2026</a:t>
+              <a:t>10/17/2026</a:t>
             </a:fld>
             <a:endParaRPr lang="en-US"/>
           </a:p>
@@ -2574,7 +2574,7 @@
           <a:p>
             <a:fld id="{6383FAE1-13DE-4511-8C1B-C8AFB720664C}" type="datetimeFigureOut">
               <a:rPr lang="en-US" smtClean="0"/>
-              <a:t>5/18/2026</a:t>
+              <a:t>10/17/2026</a:t>
             </a:fld>
             <a:endParaRPr lang="en-US"/>
           </a:p>
@@ -2986,7 +2986,7 @@
           <a:p>
             <a:fld id="{6383FAE1-13DE-4511-8C1B-C8AFB720664C}" type="datetimeFigureOut">
               <a:rPr lang="en-US" smtClean="0"/>
-              <a:t>5/18/2026</a:t>
+              <a:t>10/17/2026</a:t>
             </a:fld>
             <a:endParaRPr lang="en-US"/>
           </a:p>
@@ -3127,7 +3127,7 @@
           <a:p>
             <a:fld id="{6383FAE1-13DE-4511-8C1B-C8AFB720664C}" type="datetimeFigureOut">
               <a:rPr lang="en-US" smtClean="0"/>
-              <a:t>5/18/2026</a:t>
+              <a:t>10/17/2026</a:t>
             </a:fld>
             <a:endParaRPr lang="en-US"/>
           </a:p>
@@ -3240,7 +3240,7 @@
           <a:p>
             <a:fld id="{6383FAE1-13DE-4511-8C1B-C8AFB720664C}" type="datetimeFigureOut">
               <a:rPr lang="en-US" smtClean="0"/>
-              <a:t>5/18/2026</a:t>
+              <a:t>10/17/2026</a:t>
             </a:fld>
             <a:endParaRPr lang="en-US"/>
           </a:p>
@@ -3551,7 +3551,7 @@
           <a:p>
             <a:fld id="{6383FAE1-13DE-4511-8C1B-C8AFB720664C}" type="datetimeFigureOut">
               <a:rPr lang="en-US" smtClean="0"/>
-              <a:t>5/18/2026</a:t>
+              <a:t>10/17/2026</a:t>
             </a:fld>
             <a:endParaRPr lang="en-US"/>
           </a:p>
@@ -3842,7 +3842,7 @@
           <a:p>
             <a:fld id="{6383FAE1-13DE-4511-8C1B-C8AFB720664C}" type="datetimeFigureOut">
               <a:rPr lang="en-US" smtClean="0"/>
-              <a:t>5/18/2026</a:t>
+              <a:t>10/17/2026</a:t>
             </a:fld>
             <a:endParaRPr lang="en-US"/>
           </a:p>
@@ -4086,7 +4086,7 @@
           <a:p>
             <a:fld id="{6383FAE1-13DE-4511-8C1B-C8AFB720664C}" type="datetimeFigureOut">
               <a:rPr lang="en-US" smtClean="0"/>
-              <a:t>5/18/2026</a:t>
+              <a:t>10/17/2026</a:t>
             </a:fld>
             <a:endParaRPr lang="en-US"/>
           </a:p>
@@ -6249,7 +6249,42 @@
                   </a:schemeClr>
                 </a:solidFill>
               </a:rPr>
-              <a:t>“Every year, financial fraud costs the world over $5 trillion. Why are humans losing — and why is AI winning?”</a:t>
+              <a:t>“Every year, financial fraud costs the world over $5 trillion</a:t>
+            </a:r>
+            <a:r>
+              <a:rPr lang="en-US" sz="2400" i="1">
+                <a:solidFill>
+                  <a:schemeClr val="accent6">
+                    <a:lumMod val="60000"/>
+                    <a:lumOff val="40000"/>
+                  </a:schemeClr>
+                </a:solidFill>
+              </a:rPr>
+              <a:t>. </a:t>
+            </a:r>
+          </a:p>
+          <a:p>
+            <a:r>
+              <a:rPr lang="en-US" sz="2400" i="1">
+                <a:solidFill>
+                  <a:schemeClr val="accent6">
+                    <a:lumMod val="60000"/>
+                    <a:lumOff val="40000"/>
+                  </a:schemeClr>
+                </a:solidFill>
+              </a:rPr>
+              <a:t>To catch fraud, why </a:t>
+            </a:r>
+            <a:r>
+              <a:rPr lang="en-US" sz="2400" i="1" dirty="0">
+                <a:solidFill>
+                  <a:schemeClr val="accent6">
+                    <a:lumMod val="60000"/>
+                    <a:lumOff val="40000"/>
+                  </a:schemeClr>
+                </a:solidFill>
+              </a:rPr>
+              <a:t>are humans losing — and why is AI winning?”</a:t>
             </a:r>
           </a:p>
           <a:p>
@@ -6419,7 +6454,7 @@
         <p:spPr>
           <a:xfrm>
             <a:off x="274320" y="310815"/>
-            <a:ext cx="10405872" cy="3595856"/>
+            <a:ext cx="10405872" cy="2805896"/>
           </a:xfrm>
           <a:prstGeom prst="rect">
             <a:avLst/>
@@ -6598,35 +6633,10 @@
                 <a:effectLst/>
                 <a:latin typeface="Anthropic Sans"/>
               </a:rPr>
-              <a:t>Money laundering </a:t>
-            </a:r>
-          </a:p>
-          <a:p>
-            <a:pPr algn="l">
-              <a:spcBef>
-                <a:spcPts val="150"/>
-              </a:spcBef>
-              <a:buNone/>
-            </a:pPr>
-            <a:endParaRPr lang="en-US" sz="2400" dirty="0">
-              <a:solidFill>
-                <a:schemeClr val="accent6">
-                  <a:lumMod val="60000"/>
-                  <a:lumOff val="40000"/>
-                </a:schemeClr>
-              </a:solidFill>
-              <a:latin typeface="Anthropic Sans"/>
-            </a:endParaRPr>
-          </a:p>
-          <a:p>
-            <a:pPr algn="l">
-              <a:spcBef>
-                <a:spcPts val="150"/>
-              </a:spcBef>
-              <a:buNone/>
-            </a:pPr>
-            <a:r>
-              <a:rPr lang="en-US" sz="2400" b="0" i="0" dirty="0">
+              <a:t>Money </a:t>
+            </a:r>
+            <a:r>
+              <a:rPr lang="en-US" sz="2400" b="0" i="0">
                 <a:solidFill>
                   <a:schemeClr val="accent6">
                     <a:lumMod val="60000"/>
@@ -6636,8 +6646,18 @@
                 <a:effectLst/>
                 <a:latin typeface="Anthropic Sans"/>
               </a:rPr>
-              <a:t>— real examples with real dollar losses.</a:t>
-            </a:r>
+              <a:t>laundering </a:t>
+            </a:r>
+            <a:endParaRPr lang="en-US" sz="2400" b="0" i="0" dirty="0">
+              <a:solidFill>
+                <a:schemeClr val="accent6">
+                  <a:lumMod val="60000"/>
+                  <a:lumOff val="40000"/>
+                </a:schemeClr>
+              </a:solidFill>
+              <a:effectLst/>
+              <a:latin typeface="Anthropic Sans"/>
+            </a:endParaRPr>
           </a:p>
         </p:txBody>
       </p:sp>
@@ -6976,7 +6996,7 @@
         </p:nvSpPr>
         <p:spPr>
           <a:xfrm>
-            <a:off x="521208" y="768015"/>
+            <a:off x="0" y="566928"/>
             <a:ext cx="10405872" cy="1620957"/>
           </a:xfrm>
           <a:prstGeom prst="rect">
@@ -7023,11 +7043,10 @@
             </a:endParaRPr>
           </a:p>
           <a:p>
-            <a:pPr algn="l">
+            <a:pPr>
               <a:spcBef>
                 <a:spcPts val="150"/>
               </a:spcBef>
-              <a:buNone/>
             </a:pPr>
             <a:r>
               <a:rPr lang="en-US" sz="2400" b="0" i="0" dirty="0">
@@ -7040,16 +7059,46 @@
                 <a:effectLst/>
                 <a:latin typeface="Anthropic Sans"/>
               </a:rPr>
-              <a:t>Introducing class imbalance: fraud is ~0.1% of transactions. </a:t>
-            </a:r>
-          </a:p>
-          <a:p>
-            <a:pPr algn="l">
-              <a:spcBef>
-                <a:spcPts val="150"/>
-              </a:spcBef>
-              <a:buNone/>
-            </a:pPr>
+              <a:t>Introducing class imbalance: fraud </a:t>
+            </a:r>
+            <a:r>
+              <a:rPr lang="en-US" sz="2400" b="0" i="0">
+                <a:solidFill>
+                  <a:schemeClr val="accent6">
+                    <a:lumMod val="60000"/>
+                    <a:lumOff val="40000"/>
+                  </a:schemeClr>
+                </a:solidFill>
+                <a:effectLst/>
+                <a:latin typeface="Anthropic Sans"/>
+              </a:rPr>
+              <a:t>is ~</a:t>
+            </a:r>
+            <a:r>
+              <a:rPr lang="en-US" sz="2400">
+                <a:solidFill>
+                  <a:schemeClr val="accent6">
+                    <a:lumMod val="60000"/>
+                    <a:lumOff val="40000"/>
+                  </a:schemeClr>
+                </a:solidFill>
+                <a:latin typeface="Anthropic Sans"/>
+              </a:rPr>
+              <a:t> 0.1%</a:t>
+            </a:r>
+            <a:r>
+              <a:rPr lang="en-US" sz="2400" b="0" i="0">
+                <a:solidFill>
+                  <a:schemeClr val="accent6">
+                    <a:lumMod val="60000"/>
+                    <a:lumOff val="40000"/>
+                  </a:schemeClr>
+                </a:solidFill>
+                <a:effectLst/>
+                <a:latin typeface="Anthropic Sans"/>
+              </a:rPr>
+              <a:t> </a:t>
+            </a:r>
             <a:r>
               <a:rPr lang="en-US" sz="2400" b="0" i="0" dirty="0">
                 <a:solidFill>
@@ -7061,8 +7110,263 @@
                 <a:effectLst/>
                 <a:latin typeface="Anthropic Sans"/>
               </a:rPr>
-              <a:t>Why this makes analytics hard and interesting.</a:t>
-            </a:r>
+              <a:t>of transactions. </a:t>
+            </a:r>
+          </a:p>
+          <a:p>
+            <a:pPr algn="l">
+              <a:spcBef>
+                <a:spcPts val="150"/>
+              </a:spcBef>
+              <a:buNone/>
+            </a:pPr>
+            <a:r>
+              <a:rPr lang="en-US" sz="2400">
+                <a:solidFill>
+                  <a:schemeClr val="accent6">
+                    <a:lumMod val="60000"/>
+                    <a:lumOff val="40000"/>
+                  </a:schemeClr>
+                </a:solidFill>
+                <a:latin typeface="Anthropic Sans"/>
+              </a:rPr>
+              <a:t>T</a:t>
+            </a:r>
+            <a:r>
+              <a:rPr lang="en-US" sz="2400" b="0" i="0">
+                <a:solidFill>
+                  <a:schemeClr val="accent6">
+                    <a:lumMod val="60000"/>
+                    <a:lumOff val="40000"/>
+                  </a:schemeClr>
+                </a:solidFill>
+                <a:effectLst/>
+                <a:latin typeface="Anthropic Sans"/>
+              </a:rPr>
+              <a:t>his </a:t>
+            </a:r>
+            <a:r>
+              <a:rPr lang="en-US" sz="2400" b="0" i="0" dirty="0">
+                <a:solidFill>
+                  <a:schemeClr val="accent6">
+                    <a:lumMod val="60000"/>
+                    <a:lumOff val="40000"/>
+                  </a:schemeClr>
+                </a:solidFill>
+                <a:effectLst/>
+                <a:latin typeface="Anthropic Sans"/>
+              </a:rPr>
+              <a:t>makes </a:t>
+            </a:r>
+            <a:r>
+              <a:rPr lang="en-US" sz="2400" b="0" i="0">
+                <a:solidFill>
+                  <a:schemeClr val="accent6">
+                    <a:lumMod val="60000"/>
+                    <a:lumOff val="40000"/>
+                  </a:schemeClr>
+                </a:solidFill>
+                <a:effectLst/>
+                <a:latin typeface="Anthropic Sans"/>
+              </a:rPr>
+              <a:t>analytics hard.</a:t>
+            </a:r>
+            <a:endParaRPr lang="en-US" sz="2400" b="0" i="0" dirty="0">
+              <a:solidFill>
+                <a:schemeClr val="accent6">
+                  <a:lumMod val="60000"/>
+                  <a:lumOff val="40000"/>
+                </a:schemeClr>
+              </a:solidFill>
+              <a:effectLst/>
+              <a:latin typeface="Anthropic Sans"/>
+            </a:endParaRPr>
+          </a:p>
+        </p:txBody>
+      </p:sp>
+      <p:sp>
+        <p:nvSpPr>
+          <p:cNvPr id="2" name="Rectangle 1">
+            <a:extLst>
+              <a:ext uri="{FF2B5EF4-FFF2-40B4-BE49-F238E27FC236}">
+                <a16:creationId xmlns:a16="http://schemas.microsoft.com/office/drawing/2014/main" id="{D61E1420-5EC8-6D5A-EA1A-FDBD36DA8337}"/>
+              </a:ext>
+            </a:extLst>
+          </p:cNvPr>
+          <p:cNvSpPr/>
+          <p:nvPr/>
+        </p:nvSpPr>
+        <p:spPr>
+          <a:xfrm>
+            <a:off x="7616952" y="932688"/>
+            <a:ext cx="1435608" cy="5358384"/>
+          </a:xfrm>
+          <a:prstGeom prst="rect">
+            <a:avLst/>
+          </a:prstGeom>
+          <a:solidFill>
+            <a:srgbClr val="92D050"/>
+          </a:solidFill>
+        </p:spPr>
+        <p:style>
+          <a:lnRef idx="2">
+            <a:schemeClr val="accent1">
+              <a:shade val="15000"/>
+            </a:schemeClr>
+          </a:lnRef>
+          <a:fillRef idx="1">
+            <a:schemeClr val="accent1"/>
+          </a:fillRef>
+          <a:effectRef idx="0">
+            <a:schemeClr val="accent1"/>
+          </a:effectRef>
+          <a:fontRef idx="minor">
+            <a:schemeClr val="lt1"/>
+          </a:fontRef>
+        </p:style>
+        <p:txBody>
+          <a:bodyPr rtlCol="0" anchor="ctr"/>
+          <a:lstStyle/>
+          <a:p>
+            <a:pPr algn="ctr"/>
+            <a:endParaRPr lang="en-IN"/>
+          </a:p>
+        </p:txBody>
+      </p:sp>
+      <p:sp>
+        <p:nvSpPr>
+          <p:cNvPr id="5" name="Rectangle 4">
+            <a:extLst>
+              <a:ext uri="{FF2B5EF4-FFF2-40B4-BE49-F238E27FC236}">
+                <a16:creationId xmlns:a16="http://schemas.microsoft.com/office/drawing/2014/main" id="{6C429490-CF21-74B0-66DF-8B83573B9F37}"/>
+              </a:ext>
+            </a:extLst>
+          </p:cNvPr>
+          <p:cNvSpPr/>
+          <p:nvPr/>
+        </p:nvSpPr>
+        <p:spPr>
+          <a:xfrm>
+            <a:off x="10101072" y="6172200"/>
+            <a:ext cx="1435608" cy="118872"/>
+          </a:xfrm>
+          <a:prstGeom prst="rect">
+            <a:avLst/>
+          </a:prstGeom>
+          <a:solidFill>
+            <a:srgbClr val="FF0000"/>
+          </a:solidFill>
+        </p:spPr>
+        <p:style>
+          <a:lnRef idx="2">
+            <a:schemeClr val="accent1">
+              <a:shade val="15000"/>
+            </a:schemeClr>
+          </a:lnRef>
+          <a:fillRef idx="1">
+            <a:schemeClr val="accent1"/>
+          </a:fillRef>
+          <a:effectRef idx="0">
+            <a:schemeClr val="accent1"/>
+          </a:effectRef>
+          <a:fontRef idx="minor">
+            <a:schemeClr val="lt1"/>
+          </a:fontRef>
+        </p:style>
+        <p:txBody>
+          <a:bodyPr rtlCol="0" anchor="ctr"/>
+          <a:lstStyle/>
+          <a:p>
+            <a:pPr algn="ctr"/>
+            <a:endParaRPr lang="en-IN"/>
+          </a:p>
+        </p:txBody>
+      </p:sp>
+      <p:sp>
+        <p:nvSpPr>
+          <p:cNvPr id="7" name="TextBox 6">
+            <a:extLst>
+              <a:ext uri="{FF2B5EF4-FFF2-40B4-BE49-F238E27FC236}">
+                <a16:creationId xmlns:a16="http://schemas.microsoft.com/office/drawing/2014/main" id="{640B1689-69C4-1651-0329-59D8A95568B8}"/>
+              </a:ext>
+            </a:extLst>
+          </p:cNvPr>
+          <p:cNvSpPr txBox="1"/>
+          <p:nvPr/>
+        </p:nvSpPr>
+        <p:spPr>
+          <a:xfrm>
+            <a:off x="10405872" y="5630472"/>
+            <a:ext cx="925830" cy="461665"/>
+          </a:xfrm>
+          <a:prstGeom prst="rect">
+            <a:avLst/>
+          </a:prstGeom>
+          <a:noFill/>
+        </p:spPr>
+        <p:txBody>
+          <a:bodyPr wrap="square">
+            <a:spAutoFit/>
+          </a:bodyPr>
+          <a:lstStyle/>
+          <a:p>
+            <a:r>
+              <a:rPr lang="en-US" sz="2400">
+                <a:solidFill>
+                  <a:schemeClr val="accent6">
+                    <a:lumMod val="60000"/>
+                    <a:lumOff val="40000"/>
+                  </a:schemeClr>
+                </a:solidFill>
+                <a:latin typeface="Anthropic Sans"/>
+              </a:rPr>
+              <a:t>0.1%</a:t>
+            </a:r>
+            <a:endParaRPr lang="en-IN"/>
+          </a:p>
+        </p:txBody>
+      </p:sp>
+      <p:sp>
+        <p:nvSpPr>
+          <p:cNvPr id="9" name="TextBox 8">
+            <a:extLst>
+              <a:ext uri="{FF2B5EF4-FFF2-40B4-BE49-F238E27FC236}">
+                <a16:creationId xmlns:a16="http://schemas.microsoft.com/office/drawing/2014/main" id="{6B1D7EA4-9F46-AFCA-D5BD-4B59D316BC72}"/>
+              </a:ext>
+            </a:extLst>
+          </p:cNvPr>
+          <p:cNvSpPr txBox="1"/>
+          <p:nvPr/>
+        </p:nvSpPr>
+        <p:spPr>
+          <a:xfrm>
+            <a:off x="7943088" y="471023"/>
+            <a:ext cx="1210056" cy="461665"/>
+          </a:xfrm>
+          <a:prstGeom prst="rect">
+            <a:avLst/>
+          </a:prstGeom>
+          <a:noFill/>
+        </p:spPr>
+        <p:txBody>
+          <a:bodyPr wrap="square">
+            <a:spAutoFit/>
+          </a:bodyPr>
+          <a:lstStyle/>
+          <a:p>
+            <a:r>
+              <a:rPr lang="en-US" sz="2400">
+                <a:solidFill>
+                  <a:schemeClr val="accent6">
+                    <a:lumMod val="60000"/>
+                    <a:lumOff val="40000"/>
+                  </a:schemeClr>
+                </a:solidFill>
+                <a:latin typeface="Anthropic Sans"/>
+              </a:rPr>
+              <a:t>99.9%</a:t>
+            </a:r>
+            <a:endParaRPr lang="en-IN"/>
           </a:p>
         </p:txBody>
       </p:sp>
@@ -7425,8 +7729,8 @@
           </a:p>
         </p:txBody>
       </p:sp>
-      <mc:AlternateContent xmlns:mc="http://schemas.openxmlformats.org/markup-compatibility/2006">
-        <mc:Choice xmlns:p14="http://schemas.microsoft.com/office/powerpoint/2010/main" Requires="p14">
+      <mc:AlternateContent xmlns:mc="http://schemas.openxmlformats.org/markup-compatibility/2006" xmlns:p14="http://schemas.microsoft.com/office/powerpoint/2010/main">
+        <mc:Choice Requires="p14">
           <p:contentPart p14:bwMode="auto" r:id="rId2">
             <p14:nvContentPartPr>
               <p14:cNvPr id="4" name="Ink 3">
@@ -7445,7 +7749,7 @@
             </p14:xfrm>
           </p:contentPart>
         </mc:Choice>
-        <mc:Fallback>
+        <mc:Fallback xmlns="">
           <p:pic>
             <p:nvPicPr>
               <p:cNvPr id="4" name="Ink 3">
@@ -7496,8 +7800,8 @@
             <a:chExt cx="759960" cy="330480"/>
           </a:xfrm>
         </p:grpSpPr>
-        <mc:AlternateContent xmlns:mc="http://schemas.openxmlformats.org/markup-compatibility/2006">
-          <mc:Choice xmlns:p14="http://schemas.microsoft.com/office/powerpoint/2010/main" Requires="p14">
+        <mc:AlternateContent xmlns:mc="http://schemas.openxmlformats.org/markup-compatibility/2006" xmlns:p14="http://schemas.microsoft.com/office/powerpoint/2010/main">
+          <mc:Choice Requires="p14">
             <p:contentPart p14:bwMode="auto" r:id="rId4">
               <p14:nvContentPartPr>
                 <p14:cNvPr id="6" name="Ink 5">
@@ -7516,7 +7820,7 @@
               </p14:xfrm>
             </p:contentPart>
           </mc:Choice>
-          <mc:Fallback>
+          <mc:Fallback xmlns="">
             <p:pic>
               <p:nvPicPr>
                 <p:cNvPr id="6" name="Ink 5">
@@ -7547,8 +7851,8 @@
             </p:pic>
           </mc:Fallback>
         </mc:AlternateContent>
-        <mc:AlternateContent xmlns:mc="http://schemas.openxmlformats.org/markup-compatibility/2006">
-          <mc:Choice xmlns:p14="http://schemas.microsoft.com/office/powerpoint/2010/main" Requires="p14">
+        <mc:AlternateContent xmlns:mc="http://schemas.openxmlformats.org/markup-compatibility/2006" xmlns:p14="http://schemas.microsoft.com/office/powerpoint/2010/main">
+          <mc:Choice Requires="p14">
             <p:contentPart p14:bwMode="auto" r:id="rId6">
               <p14:nvContentPartPr>
                 <p14:cNvPr id="7" name="Ink 6">
@@ -7567,7 +7871,7 @@
               </p14:xfrm>
             </p:contentPart>
           </mc:Choice>
-          <mc:Fallback>
+          <mc:Fallback xmlns="">
             <p:pic>
               <p:nvPicPr>
                 <p:cNvPr id="7" name="Ink 6">
@@ -7598,8 +7902,8 @@
             </p:pic>
           </mc:Fallback>
         </mc:AlternateContent>
-        <mc:AlternateContent xmlns:mc="http://schemas.openxmlformats.org/markup-compatibility/2006">
-          <mc:Choice xmlns:p14="http://schemas.microsoft.com/office/powerpoint/2010/main" Requires="p14">
+        <mc:AlternateContent xmlns:mc="http://schemas.openxmlformats.org/markup-compatibility/2006" xmlns:p14="http://schemas.microsoft.com/office/powerpoint/2010/main">
+          <mc:Choice Requires="p14">
             <p:contentPart p14:bwMode="auto" r:id="rId8">
               <p14:nvContentPartPr>
                 <p14:cNvPr id="8" name="Ink 7">
@@ -7618,7 +7922,7 @@
               </p14:xfrm>
             </p:contentPart>
           </mc:Choice>
-          <mc:Fallback>
+          <mc:Fallback xmlns="">
             <p:pic>
               <p:nvPicPr>
                 <p:cNvPr id="8" name="Ink 7">
@@ -7649,8 +7953,8 @@
             </p:pic>
           </mc:Fallback>
         </mc:AlternateContent>
-        <mc:AlternateContent xmlns:mc="http://schemas.openxmlformats.org/markup-compatibility/2006">
-          <mc:Choice xmlns:p14="http://schemas.microsoft.com/office/powerpoint/2010/main" Requires="p14">
+        <mc:AlternateContent xmlns:mc="http://schemas.openxmlformats.org/markup-compatibility/2006" xmlns:p14="http://schemas.microsoft.com/office/powerpoint/2010/main">
+          <mc:Choice Requires="p14">
             <p:contentPart p14:bwMode="auto" r:id="rId10">
               <p14:nvContentPartPr>
                 <p14:cNvPr id="9" name="Ink 8">
@@ -7669,7 +7973,7 @@
               </p14:xfrm>
             </p:contentPart>
           </mc:Choice>
-          <mc:Fallback>
+          <mc:Fallback xmlns="">
             <p:pic>
               <p:nvPicPr>
                 <p:cNvPr id="9" name="Ink 8">
@@ -7721,8 +8025,8 @@
             <a:chExt cx="1198800" cy="364680"/>
           </a:xfrm>
         </p:grpSpPr>
-        <mc:AlternateContent xmlns:mc="http://schemas.openxmlformats.org/markup-compatibility/2006">
-          <mc:Choice xmlns:p14="http://schemas.microsoft.com/office/powerpoint/2010/main" Requires="p14">
+        <mc:AlternateContent xmlns:mc="http://schemas.openxmlformats.org/markup-compatibility/2006" xmlns:p14="http://schemas.microsoft.com/office/powerpoint/2010/main">
+          <mc:Choice Requires="p14">
             <p:contentPart p14:bwMode="auto" r:id="rId12">
               <p14:nvContentPartPr>
                 <p14:cNvPr id="14" name="Ink 13">
@@ -7741,7 +8045,7 @@
               </p14:xfrm>
             </p:contentPart>
           </mc:Choice>
-          <mc:Fallback>
+          <mc:Fallback xmlns="">
             <p:pic>
               <p:nvPicPr>
                 <p:cNvPr id="14" name="Ink 13">
@@ -7772,8 +8076,8 @@
             </p:pic>
           </mc:Fallback>
         </mc:AlternateContent>
-        <mc:AlternateContent xmlns:mc="http://schemas.openxmlformats.org/markup-compatibility/2006">
-          <mc:Choice xmlns:p14="http://schemas.microsoft.com/office/powerpoint/2010/main" Requires="p14">
+        <mc:AlternateContent xmlns:mc="http://schemas.openxmlformats.org/markup-compatibility/2006" xmlns:p14="http://schemas.microsoft.com/office/powerpoint/2010/main">
+          <mc:Choice Requires="p14">
             <p:contentPart p14:bwMode="auto" r:id="rId14">
               <p14:nvContentPartPr>
                 <p14:cNvPr id="15" name="Ink 14">
@@ -7792,7 +8096,7 @@
               </p14:xfrm>
             </p:contentPart>
           </mc:Choice>
-          <mc:Fallback>
+          <mc:Fallback xmlns="">
             <p:pic>
               <p:nvPicPr>
                 <p:cNvPr id="15" name="Ink 14">
@@ -7823,8 +8127,8 @@
             </p:pic>
           </mc:Fallback>
         </mc:AlternateContent>
-        <mc:AlternateContent xmlns:mc="http://schemas.openxmlformats.org/markup-compatibility/2006">
-          <mc:Choice xmlns:p14="http://schemas.microsoft.com/office/powerpoint/2010/main" Requires="p14">
+        <mc:AlternateContent xmlns:mc="http://schemas.openxmlformats.org/markup-compatibility/2006" xmlns:p14="http://schemas.microsoft.com/office/powerpoint/2010/main">
+          <mc:Choice Requires="p14">
             <p:contentPart p14:bwMode="auto" r:id="rId16">
               <p14:nvContentPartPr>
                 <p14:cNvPr id="16" name="Ink 15">
@@ -7843,7 +8147,7 @@
               </p14:xfrm>
             </p:contentPart>
           </mc:Choice>
-          <mc:Fallback>
+          <mc:Fallback xmlns="">
             <p:pic>
               <p:nvPicPr>
                 <p:cNvPr id="16" name="Ink 15">
@@ -7874,8 +8178,8 @@
             </p:pic>
           </mc:Fallback>
         </mc:AlternateContent>
-        <mc:AlternateContent xmlns:mc="http://schemas.openxmlformats.org/markup-compatibility/2006">
-          <mc:Choice xmlns:p14="http://schemas.microsoft.com/office/powerpoint/2010/main" Requires="p14">
+        <mc:AlternateContent xmlns:mc="http://schemas.openxmlformats.org/markup-compatibility/2006" xmlns:p14="http://schemas.microsoft.com/office/powerpoint/2010/main">
+          <mc:Choice Requires="p14">
             <p:contentPart p14:bwMode="auto" r:id="rId18">
               <p14:nvContentPartPr>
                 <p14:cNvPr id="18" name="Ink 17">
@@ -7894,7 +8198,7 @@
               </p14:xfrm>
             </p:contentPart>
           </mc:Choice>
-          <mc:Fallback>
+          <mc:Fallback xmlns="">
             <p:pic>
               <p:nvPicPr>
                 <p:cNvPr id="18" name="Ink 17">
@@ -7925,8 +8229,8 @@
             </p:pic>
           </mc:Fallback>
         </mc:AlternateContent>
-        <mc:AlternateContent xmlns:mc="http://schemas.openxmlformats.org/markup-compatibility/2006">
-          <mc:Choice xmlns:p14="http://schemas.microsoft.com/office/powerpoint/2010/main" Requires="p14">
+        <mc:AlternateContent xmlns:mc="http://schemas.openxmlformats.org/markup-compatibility/2006" xmlns:p14="http://schemas.microsoft.com/office/powerpoint/2010/main">
+          <mc:Choice Requires="p14">
             <p:contentPart p14:bwMode="auto" r:id="rId20">
               <p14:nvContentPartPr>
                 <p14:cNvPr id="19" name="Ink 18">
@@ -7945,7 +8249,7 @@
               </p14:xfrm>
             </p:contentPart>
           </mc:Choice>
-          <mc:Fallback>
+          <mc:Fallback xmlns="">
             <p:pic>
               <p:nvPicPr>
                 <p:cNvPr id="19" name="Ink 18">
@@ -7976,8 +8280,8 @@
             </p:pic>
           </mc:Fallback>
         </mc:AlternateContent>
-        <mc:AlternateContent xmlns:mc="http://schemas.openxmlformats.org/markup-compatibility/2006">
-          <mc:Choice xmlns:p14="http://schemas.microsoft.com/office/powerpoint/2010/main" Requires="p14">
+        <mc:AlternateContent xmlns:mc="http://schemas.openxmlformats.org/markup-compatibility/2006" xmlns:p14="http://schemas.microsoft.com/office/powerpoint/2010/main">
+          <mc:Choice Requires="p14">
             <p:contentPart p14:bwMode="auto" r:id="rId22">
               <p14:nvContentPartPr>
                 <p14:cNvPr id="20" name="Ink 19">
@@ -7996,7 +8300,7 @@
               </p14:xfrm>
             </p:contentPart>
           </mc:Choice>
-          <mc:Fallback>
+          <mc:Fallback xmlns="">
             <p:pic>
               <p:nvPicPr>
                 <p:cNvPr id="20" name="Ink 19">
@@ -8048,8 +8352,8 @@
             <a:chExt cx="1208160" cy="494280"/>
           </a:xfrm>
         </p:grpSpPr>
-        <mc:AlternateContent xmlns:mc="http://schemas.openxmlformats.org/markup-compatibility/2006">
-          <mc:Choice xmlns:p14="http://schemas.microsoft.com/office/powerpoint/2010/main" Requires="p14">
+        <mc:AlternateContent xmlns:mc="http://schemas.openxmlformats.org/markup-compatibility/2006" xmlns:p14="http://schemas.microsoft.com/office/powerpoint/2010/main">
+          <mc:Choice Requires="p14">
             <p:contentPart p14:bwMode="auto" r:id="rId24">
               <p14:nvContentPartPr>
                 <p14:cNvPr id="11" name="Ink 10">
@@ -8068,7 +8372,7 @@
               </p14:xfrm>
             </p:contentPart>
           </mc:Choice>
-          <mc:Fallback>
+          <mc:Fallback xmlns="">
             <p:pic>
               <p:nvPicPr>
                 <p:cNvPr id="11" name="Ink 10">
@@ -8099,8 +8403,8 @@
             </p:pic>
           </mc:Fallback>
         </mc:AlternateContent>
-        <mc:AlternateContent xmlns:mc="http://schemas.openxmlformats.org/markup-compatibility/2006">
-          <mc:Choice xmlns:p14="http://schemas.microsoft.com/office/powerpoint/2010/main" Requires="p14">
+        <mc:AlternateContent xmlns:mc="http://schemas.openxmlformats.org/markup-compatibility/2006" xmlns:p14="http://schemas.microsoft.com/office/powerpoint/2010/main">
+          <mc:Choice Requires="p14">
             <p:contentPart p14:bwMode="auto" r:id="rId26">
               <p14:nvContentPartPr>
                 <p14:cNvPr id="12" name="Ink 11">
@@ -8119,7 +8423,7 @@
               </p14:xfrm>
             </p:contentPart>
           </mc:Choice>
-          <mc:Fallback>
+          <mc:Fallback xmlns="">
             <p:pic>
               <p:nvPicPr>
                 <p:cNvPr id="12" name="Ink 11">
@@ -8150,8 +8454,8 @@
             </p:pic>
           </mc:Fallback>
         </mc:AlternateContent>
-        <mc:AlternateContent xmlns:mc="http://schemas.openxmlformats.org/markup-compatibility/2006">
-          <mc:Choice xmlns:p14="http://schemas.microsoft.com/office/powerpoint/2010/main" Requires="p14">
+        <mc:AlternateContent xmlns:mc="http://schemas.openxmlformats.org/markup-compatibility/2006" xmlns:p14="http://schemas.microsoft.com/office/powerpoint/2010/main">
+          <mc:Choice Requires="p14">
             <p:contentPart p14:bwMode="auto" r:id="rId28">
               <p14:nvContentPartPr>
                 <p14:cNvPr id="22" name="Ink 21">
@@ -8170,7 +8474,7 @@
               </p14:xfrm>
             </p:contentPart>
           </mc:Choice>
-          <mc:Fallback>
+          <mc:Fallback xmlns="">
             <p:pic>
               <p:nvPicPr>
                 <p:cNvPr id="22" name="Ink 21">
@@ -8201,8 +8505,8 @@
             </p:pic>
           </mc:Fallback>
         </mc:AlternateContent>
-        <mc:AlternateContent xmlns:mc="http://schemas.openxmlformats.org/markup-compatibility/2006">
-          <mc:Choice xmlns:p14="http://schemas.microsoft.com/office/powerpoint/2010/main" Requires="p14">
+        <mc:AlternateContent xmlns:mc="http://schemas.openxmlformats.org/markup-compatibility/2006" xmlns:p14="http://schemas.microsoft.com/office/powerpoint/2010/main">
+          <mc:Choice Requires="p14">
             <p:contentPart p14:bwMode="auto" r:id="rId30">
               <p14:nvContentPartPr>
                 <p14:cNvPr id="23" name="Ink 22">
@@ -8221,7 +8525,7 @@
               </p14:xfrm>
             </p:contentPart>
           </mc:Choice>
-          <mc:Fallback>
+          <mc:Fallback xmlns="">
             <p:pic>
               <p:nvPicPr>
                 <p:cNvPr id="23" name="Ink 22">
@@ -8252,8 +8556,8 @@
             </p:pic>
           </mc:Fallback>
         </mc:AlternateContent>
-        <mc:AlternateContent xmlns:mc="http://schemas.openxmlformats.org/markup-compatibility/2006">
-          <mc:Choice xmlns:p14="http://schemas.microsoft.com/office/powerpoint/2010/main" Requires="p14">
+        <mc:AlternateContent xmlns:mc="http://schemas.openxmlformats.org/markup-compatibility/2006" xmlns:p14="http://schemas.microsoft.com/office/powerpoint/2010/main">
+          <mc:Choice Requires="p14">
             <p:contentPart p14:bwMode="auto" r:id="rId32">
               <p14:nvContentPartPr>
                 <p14:cNvPr id="24" name="Ink 23">
@@ -8272,7 +8576,7 @@
               </p14:xfrm>
             </p:contentPart>
           </mc:Choice>
-          <mc:Fallback>
+          <mc:Fallback xmlns="">
             <p:pic>
               <p:nvPicPr>
                 <p:cNvPr id="24" name="Ink 23">
@@ -8303,8 +8607,8 @@
             </p:pic>
           </mc:Fallback>
         </mc:AlternateContent>
-        <mc:AlternateContent xmlns:mc="http://schemas.openxmlformats.org/markup-compatibility/2006">
-          <mc:Choice xmlns:p14="http://schemas.microsoft.com/office/powerpoint/2010/main" Requires="p14">
+        <mc:AlternateContent xmlns:mc="http://schemas.openxmlformats.org/markup-compatibility/2006" xmlns:p14="http://schemas.microsoft.com/office/powerpoint/2010/main">
+          <mc:Choice Requires="p14">
             <p:contentPart p14:bwMode="auto" r:id="rId34">
               <p14:nvContentPartPr>
                 <p14:cNvPr id="26" name="Ink 25">
@@ -8323,7 +8627,7 @@
               </p14:xfrm>
             </p:contentPart>
           </mc:Choice>
-          <mc:Fallback>
+          <mc:Fallback xmlns="">
             <p:pic>
               <p:nvPicPr>
                 <p:cNvPr id="26" name="Ink 25">
@@ -8354,8 +8658,8 @@
             </p:pic>
           </mc:Fallback>
         </mc:AlternateContent>
-        <mc:AlternateContent xmlns:mc="http://schemas.openxmlformats.org/markup-compatibility/2006">
-          <mc:Choice xmlns:p14="http://schemas.microsoft.com/office/powerpoint/2010/main" Requires="p14">
+        <mc:AlternateContent xmlns:mc="http://schemas.openxmlformats.org/markup-compatibility/2006" xmlns:p14="http://schemas.microsoft.com/office/powerpoint/2010/main">
+          <mc:Choice Requires="p14">
             <p:contentPart p14:bwMode="auto" r:id="rId36">
               <p14:nvContentPartPr>
                 <p14:cNvPr id="27" name="Ink 26">
@@ -8374,7 +8678,7 @@
               </p14:xfrm>
             </p:contentPart>
           </mc:Choice>
-          <mc:Fallback>
+          <mc:Fallback xmlns="">
             <p:pic>
               <p:nvPicPr>
                 <p:cNvPr id="27" name="Ink 26">
@@ -8405,8 +8709,8 @@
             </p:pic>
           </mc:Fallback>
         </mc:AlternateContent>
-        <mc:AlternateContent xmlns:mc="http://schemas.openxmlformats.org/markup-compatibility/2006">
-          <mc:Choice xmlns:p14="http://schemas.microsoft.com/office/powerpoint/2010/main" Requires="p14">
+        <mc:AlternateContent xmlns:mc="http://schemas.openxmlformats.org/markup-compatibility/2006" xmlns:p14="http://schemas.microsoft.com/office/powerpoint/2010/main">
+          <mc:Choice Requires="p14">
             <p:contentPart p14:bwMode="auto" r:id="rId38">
               <p14:nvContentPartPr>
                 <p14:cNvPr id="28" name="Ink 27">
@@ -8425,7 +8729,7 @@
               </p14:xfrm>
             </p:contentPart>
           </mc:Choice>
-          <mc:Fallback>
+          <mc:Fallback xmlns="">
             <p:pic>
               <p:nvPicPr>
                 <p:cNvPr id="28" name="Ink 27">
@@ -8507,8 +8811,8 @@
         </p:nvSpPr>
         <p:spPr>
           <a:xfrm>
-            <a:off x="521208" y="768015"/>
-            <a:ext cx="10405872" cy="2015936"/>
+            <a:off x="228600" y="557703"/>
+            <a:ext cx="6409944" cy="2015936"/>
           </a:xfrm>
           <a:prstGeom prst="rect">
             <a:avLst/>
@@ -8678,7 +8982,7 @@
         </p:blipFill>
         <p:spPr>
           <a:xfrm>
-            <a:off x="675471" y="1852631"/>
+            <a:off x="465159" y="1130255"/>
             <a:ext cx="8792802" cy="2457793"/>
           </a:xfrm>
           <a:prstGeom prst="rect">
@@ -8744,7 +9048,7 @@
         </p:blipFill>
         <p:spPr>
           <a:xfrm>
-            <a:off x="1906553" y="431892"/>
+            <a:off x="1769393" y="431892"/>
             <a:ext cx="8378894" cy="5994215"/>
           </a:xfrm>
           <a:prstGeom prst="rect">
